--- a/images/respic/research_overview.pptx
+++ b/images/respic/research_overview.pptx
@@ -5,13 +5,14 @@
     <p:sldMasterId id="2147483648" r:id="rId1"/>
   </p:sldMasterIdLst>
   <p:notesMasterIdLst>
-    <p:notesMasterId r:id="rId6"/>
+    <p:notesMasterId r:id="rId7"/>
   </p:notesMasterIdLst>
   <p:sldIdLst>
     <p:sldId id="658" r:id="rId2"/>
     <p:sldId id="659" r:id="rId3"/>
     <p:sldId id="661" r:id="rId4"/>
     <p:sldId id="662" r:id="rId5"/>
+    <p:sldId id="663" r:id="rId6"/>
   </p:sldIdLst>
   <p:sldSz cx="12192000" cy="6858000"/>
   <p:notesSz cx="6858000" cy="9144000"/>
@@ -203,7 +204,7 @@
           <a:p>
             <a:fld id="{6BA546CD-0611-7545-8F55-072F0299D807}" type="datetimeFigureOut">
               <a:rPr lang="en-US" smtClean="0"/>
-              <a:t>10/5/22</a:t>
+              <a:t>5/12/26</a:t>
             </a:fld>
             <a:endParaRPr lang="en-US"/>
           </a:p>
@@ -892,7 +893,7 @@
           <a:p>
             <a:fld id="{9DCA369C-CB3F-4260-86E8-FD3F54C73225}" type="datetimeFigureOut">
               <a:rPr lang="en-US" smtClean="0"/>
-              <a:t>10/5/22</a:t>
+              <a:t>5/12/26</a:t>
             </a:fld>
             <a:endParaRPr lang="en-US"/>
           </a:p>
@@ -1100,7 +1101,7 @@
           <a:p>
             <a:fld id="{9DCA369C-CB3F-4260-86E8-FD3F54C73225}" type="datetimeFigureOut">
               <a:rPr lang="en-US" smtClean="0"/>
-              <a:t>10/5/22</a:t>
+              <a:t>5/12/26</a:t>
             </a:fld>
             <a:endParaRPr lang="en-US"/>
           </a:p>
@@ -1405,7 +1406,7 @@
           <a:p>
             <a:fld id="{9DCA369C-CB3F-4260-86E8-FD3F54C73225}" type="datetimeFigureOut">
               <a:rPr lang="en-US" smtClean="0"/>
-              <a:t>10/5/22</a:t>
+              <a:t>5/12/26</a:t>
             </a:fld>
             <a:endParaRPr lang="en-US"/>
           </a:p>
@@ -1670,7 +1671,7 @@
           <a:p>
             <a:fld id="{9DCA369C-CB3F-4260-86E8-FD3F54C73225}" type="datetimeFigureOut">
               <a:rPr lang="en-US" smtClean="0"/>
-              <a:t>10/5/22</a:t>
+              <a:t>5/12/26</a:t>
             </a:fld>
             <a:endParaRPr lang="en-US"/>
           </a:p>
@@ -2082,7 +2083,7 @@
           <a:p>
             <a:fld id="{9DCA369C-CB3F-4260-86E8-FD3F54C73225}" type="datetimeFigureOut">
               <a:rPr lang="en-US" smtClean="0"/>
-              <a:t>10/5/22</a:t>
+              <a:t>5/12/26</a:t>
             </a:fld>
             <a:endParaRPr lang="en-US"/>
           </a:p>
@@ -2223,7 +2224,7 @@
           <a:p>
             <a:fld id="{9DCA369C-CB3F-4260-86E8-FD3F54C73225}" type="datetimeFigureOut">
               <a:rPr lang="en-US" smtClean="0"/>
-              <a:t>10/5/22</a:t>
+              <a:t>5/12/26</a:t>
             </a:fld>
             <a:endParaRPr lang="en-US"/>
           </a:p>
@@ -2336,7 +2337,7 @@
           <a:p>
             <a:fld id="{9DCA369C-CB3F-4260-86E8-FD3F54C73225}" type="datetimeFigureOut">
               <a:rPr lang="en-US" smtClean="0"/>
-              <a:t>10/5/22</a:t>
+              <a:t>5/12/26</a:t>
             </a:fld>
             <a:endParaRPr lang="en-US"/>
           </a:p>
@@ -2647,7 +2648,7 @@
           <a:p>
             <a:fld id="{9DCA369C-CB3F-4260-86E8-FD3F54C73225}" type="datetimeFigureOut">
               <a:rPr lang="en-US" smtClean="0"/>
-              <a:t>10/5/22</a:t>
+              <a:t>5/12/26</a:t>
             </a:fld>
             <a:endParaRPr lang="en-US"/>
           </a:p>
@@ -2935,7 +2936,7 @@
           <a:p>
             <a:fld id="{9DCA369C-CB3F-4260-86E8-FD3F54C73225}" type="datetimeFigureOut">
               <a:rPr lang="en-US" smtClean="0"/>
-              <a:t>10/5/22</a:t>
+              <a:t>5/12/26</a:t>
             </a:fld>
             <a:endParaRPr lang="en-US"/>
           </a:p>
@@ -3176,7 +3177,7 @@
           <a:p>
             <a:fld id="{9DCA369C-CB3F-4260-86E8-FD3F54C73225}" type="datetimeFigureOut">
               <a:rPr lang="en-US" smtClean="0"/>
-              <a:t>10/5/22</a:t>
+              <a:t>5/12/26</a:t>
             </a:fld>
             <a:endParaRPr lang="en-US"/>
           </a:p>
@@ -3653,6 +3654,13 @@
             <a:schemeClr val="lt1"/>
           </a:fontRef>
         </p:style>
+        <p:txBody>
+          <a:bodyPr/>
+          <a:lstStyle/>
+          <a:p>
+            <a:endParaRPr lang="en-US"/>
+          </a:p>
+        </p:txBody>
       </p:sp>
       <p:sp>
         <p:nvSpPr>
@@ -3766,6 +3774,13 @@
             <a:schemeClr val="lt1"/>
           </a:fontRef>
         </p:style>
+        <p:txBody>
+          <a:bodyPr/>
+          <a:lstStyle/>
+          <a:p>
+            <a:endParaRPr lang="en-US"/>
+          </a:p>
+        </p:txBody>
       </p:sp>
       <p:sp>
         <p:nvSpPr>
@@ -5243,6 +5258,13 @@
             <a:schemeClr val="lt1"/>
           </a:fontRef>
         </p:style>
+        <p:txBody>
+          <a:bodyPr/>
+          <a:lstStyle/>
+          <a:p>
+            <a:endParaRPr lang="en-US"/>
+          </a:p>
+        </p:txBody>
       </p:sp>
       <p:sp>
         <p:nvSpPr>
@@ -5356,6 +5378,13 @@
             <a:schemeClr val="lt1"/>
           </a:fontRef>
         </p:style>
+        <p:txBody>
+          <a:bodyPr/>
+          <a:lstStyle/>
+          <a:p>
+            <a:endParaRPr lang="en-US"/>
+          </a:p>
+        </p:txBody>
       </p:sp>
       <p:sp>
         <p:nvSpPr>
@@ -6076,6 +6105,13 @@
             <a:schemeClr val="lt1"/>
           </a:fontRef>
         </p:style>
+        <p:txBody>
+          <a:bodyPr/>
+          <a:lstStyle/>
+          <a:p>
+            <a:endParaRPr lang="en-US"/>
+          </a:p>
+        </p:txBody>
       </p:sp>
       <p:sp>
         <p:nvSpPr>
@@ -6189,6 +6225,13 @@
             <a:schemeClr val="lt1"/>
           </a:fontRef>
         </p:style>
+        <p:txBody>
+          <a:bodyPr/>
+          <a:lstStyle/>
+          <a:p>
+            <a:endParaRPr lang="en-US"/>
+          </a:p>
+        </p:txBody>
       </p:sp>
       <p:sp>
         <p:nvSpPr>
@@ -6955,7 +6998,7 @@
                   <a:latin typeface="Arial" panose="020B0604020202020204" pitchFamily="34" charset="0"/>
                   <a:cs typeface="Arial" panose="020B0604020202020204" pitchFamily="34" charset="0"/>
                 </a:rPr>
-                <a:t>CAD</a:t>
+                <a:t>EDA</a:t>
               </a:r>
             </a:p>
           </p:txBody>
@@ -7266,7 +7309,7 @@
                 <a:latin typeface="Arial" panose="020B0604020202020204" pitchFamily="34" charset="0"/>
                 <a:cs typeface="Arial" panose="020B0604020202020204" pitchFamily="34" charset="0"/>
               </a:rPr>
-              <a:t>We create novel HPC software for ML, CAD, and QC</a:t>
+              <a:t>We create novel HPC software for ML, EDA, and QC</a:t>
             </a:r>
           </a:p>
         </p:txBody>
@@ -14623,6 +14666,1373 @@
 </p:sld>
 </file>
 
+<file path=ppt/slides/slide5.xml><?xml version="1.0" encoding="utf-8"?>
+<p:sld xmlns:a="http://schemas.openxmlformats.org/drawingml/2006/main" xmlns:r="http://schemas.openxmlformats.org/officeDocument/2006/relationships" xmlns:p="http://schemas.openxmlformats.org/presentationml/2006/main">
+  <p:cSld>
+    <p:bg>
+      <p:bgPr>
+        <a:solidFill>
+          <a:srgbClr val="1A1A1A"/>
+        </a:solidFill>
+        <a:effectLst/>
+      </p:bgPr>
+    </p:bg>
+    <p:spTree>
+      <p:nvGrpSpPr>
+        <p:cNvPr id="1" name=""/>
+        <p:cNvGrpSpPr/>
+        <p:nvPr/>
+      </p:nvGrpSpPr>
+      <p:grpSpPr>
+        <a:xfrm>
+          <a:off x="0" y="0"/>
+          <a:ext cx="0" cy="0"/>
+          <a:chOff x="0" y="0"/>
+          <a:chExt cx="0" cy="0"/>
+        </a:xfrm>
+      </p:grpSpPr>
+      <p:sp>
+        <p:nvSpPr>
+          <p:cNvPr id="3" name="Shape 2">
+            <a:extLst>
+              <a:ext uri="{FF2B5EF4-FFF2-40B4-BE49-F238E27FC236}">
+                <a16:creationId xmlns:a16="http://schemas.microsoft.com/office/drawing/2014/main" id="{38A12B1E-0477-4395-0E69-670BBC09F383}"/>
+              </a:ext>
+            </a:extLst>
+          </p:cNvPr>
+          <p:cNvSpPr/>
+          <p:nvPr/>
+        </p:nvSpPr>
+        <p:spPr>
+          <a:xfrm>
+            <a:off x="3728478" y="2473120"/>
+            <a:ext cx="1884044" cy="1884045"/>
+          </a:xfrm>
+          <a:prstGeom prst="gear6">
+            <a:avLst/>
+          </a:prstGeom>
+          <a:solidFill>
+            <a:schemeClr val="accent5">
+              <a:lumMod val="75000"/>
+            </a:schemeClr>
+          </a:solidFill>
+          <a:ln>
+            <a:solidFill>
+              <a:srgbClr val="0070C0"/>
+            </a:solidFill>
+          </a:ln>
+        </p:spPr>
+        <p:style>
+          <a:lnRef idx="2">
+            <a:schemeClr val="lt1">
+              <a:hueOff val="0"/>
+              <a:satOff val="0"/>
+              <a:lumOff val="0"/>
+              <a:alphaOff val="0"/>
+            </a:schemeClr>
+          </a:lnRef>
+          <a:fillRef idx="1">
+            <a:schemeClr val="accent1">
+              <a:hueOff val="0"/>
+              <a:satOff val="0"/>
+              <a:lumOff val="0"/>
+              <a:alphaOff val="0"/>
+            </a:schemeClr>
+          </a:fillRef>
+          <a:effectRef idx="0">
+            <a:schemeClr val="accent1">
+              <a:hueOff val="0"/>
+              <a:satOff val="0"/>
+              <a:lumOff val="0"/>
+              <a:alphaOff val="0"/>
+            </a:schemeClr>
+          </a:effectRef>
+          <a:fontRef idx="minor">
+            <a:schemeClr val="lt1"/>
+          </a:fontRef>
+        </p:style>
+        <p:txBody>
+          <a:bodyPr/>
+          <a:lstStyle/>
+          <a:p>
+            <a:endParaRPr lang="en-US"/>
+          </a:p>
+        </p:txBody>
+      </p:sp>
+      <p:sp>
+        <p:nvSpPr>
+          <p:cNvPr id="5" name="Oval 4">
+            <a:extLst>
+              <a:ext uri="{FF2B5EF4-FFF2-40B4-BE49-F238E27FC236}">
+                <a16:creationId xmlns:a16="http://schemas.microsoft.com/office/drawing/2014/main" id="{57C8B6CB-A09D-EA3A-D6A4-96114753720B}"/>
+              </a:ext>
+            </a:extLst>
+          </p:cNvPr>
+          <p:cNvSpPr/>
+          <p:nvPr/>
+        </p:nvSpPr>
+        <p:spPr>
+          <a:xfrm>
+            <a:off x="4128524" y="2890450"/>
+            <a:ext cx="1079406" cy="1049384"/>
+          </a:xfrm>
+          <a:prstGeom prst="ellipse">
+            <a:avLst/>
+          </a:prstGeom>
+          <a:solidFill>
+            <a:schemeClr val="bg1"/>
+          </a:solidFill>
+          <a:ln>
+            <a:solidFill>
+              <a:schemeClr val="bg1"/>
+            </a:solidFill>
+          </a:ln>
+        </p:spPr>
+        <p:style>
+          <a:lnRef idx="2">
+            <a:schemeClr val="accent1">
+              <a:shade val="50000"/>
+            </a:schemeClr>
+          </a:lnRef>
+          <a:fillRef idx="1">
+            <a:schemeClr val="accent1"/>
+          </a:fillRef>
+          <a:effectRef idx="0">
+            <a:schemeClr val="accent1"/>
+          </a:effectRef>
+          <a:fontRef idx="minor">
+            <a:schemeClr val="lt1"/>
+          </a:fontRef>
+        </p:style>
+        <p:txBody>
+          <a:bodyPr rtlCol="0" anchor="ctr"/>
+          <a:lstStyle/>
+          <a:p>
+            <a:pPr algn="ctr"/>
+            <a:endParaRPr lang="en-US" dirty="0"/>
+          </a:p>
+        </p:txBody>
+      </p:sp>
+      <p:sp>
+        <p:nvSpPr>
+          <p:cNvPr id="7" name="Shape 6">
+            <a:extLst>
+              <a:ext uri="{FF2B5EF4-FFF2-40B4-BE49-F238E27FC236}">
+                <a16:creationId xmlns:a16="http://schemas.microsoft.com/office/drawing/2014/main" id="{E5D0E5FC-23CD-6527-73B3-80E2A51E6CCF}"/>
+              </a:ext>
+            </a:extLst>
+          </p:cNvPr>
+          <p:cNvSpPr/>
+          <p:nvPr/>
+        </p:nvSpPr>
+        <p:spPr>
+          <a:xfrm>
+            <a:off x="2606022" y="3653393"/>
+            <a:ext cx="1884046" cy="1884046"/>
+          </a:xfrm>
+          <a:prstGeom prst="gear6">
+            <a:avLst/>
+          </a:prstGeom>
+          <a:solidFill>
+            <a:srgbClr val="FFC000"/>
+          </a:solidFill>
+          <a:ln>
+            <a:solidFill>
+              <a:srgbClr val="FFC000"/>
+            </a:solidFill>
+          </a:ln>
+        </p:spPr>
+        <p:style>
+          <a:lnRef idx="2">
+            <a:schemeClr val="lt1">
+              <a:hueOff val="0"/>
+              <a:satOff val="0"/>
+              <a:lumOff val="0"/>
+              <a:alphaOff val="0"/>
+            </a:schemeClr>
+          </a:lnRef>
+          <a:fillRef idx="1">
+            <a:schemeClr val="accent1">
+              <a:hueOff val="0"/>
+              <a:satOff val="0"/>
+              <a:lumOff val="0"/>
+              <a:alphaOff val="0"/>
+            </a:schemeClr>
+          </a:fillRef>
+          <a:effectRef idx="0">
+            <a:schemeClr val="accent1">
+              <a:hueOff val="0"/>
+              <a:satOff val="0"/>
+              <a:lumOff val="0"/>
+              <a:alphaOff val="0"/>
+            </a:schemeClr>
+          </a:effectRef>
+          <a:fontRef idx="minor">
+            <a:schemeClr val="lt1"/>
+          </a:fontRef>
+        </p:style>
+        <p:txBody>
+          <a:bodyPr/>
+          <a:lstStyle/>
+          <a:p>
+            <a:endParaRPr lang="en-US"/>
+          </a:p>
+        </p:txBody>
+      </p:sp>
+      <p:sp>
+        <p:nvSpPr>
+          <p:cNvPr id="8" name="Oval 7">
+            <a:extLst>
+              <a:ext uri="{FF2B5EF4-FFF2-40B4-BE49-F238E27FC236}">
+                <a16:creationId xmlns:a16="http://schemas.microsoft.com/office/drawing/2014/main" id="{8EA7850A-D37E-01E8-95BF-90D17CA252BE}"/>
+              </a:ext>
+            </a:extLst>
+          </p:cNvPr>
+          <p:cNvSpPr/>
+          <p:nvPr/>
+        </p:nvSpPr>
+        <p:spPr>
+          <a:xfrm>
+            <a:off x="3005481" y="4063466"/>
+            <a:ext cx="1082750" cy="1052636"/>
+          </a:xfrm>
+          <a:prstGeom prst="ellipse">
+            <a:avLst/>
+          </a:prstGeom>
+          <a:solidFill>
+            <a:schemeClr val="bg1"/>
+          </a:solidFill>
+          <a:ln>
+            <a:solidFill>
+              <a:schemeClr val="bg1"/>
+            </a:solidFill>
+          </a:ln>
+        </p:spPr>
+        <p:style>
+          <a:lnRef idx="2">
+            <a:schemeClr val="accent1">
+              <a:shade val="50000"/>
+            </a:schemeClr>
+          </a:lnRef>
+          <a:fillRef idx="1">
+            <a:schemeClr val="accent1"/>
+          </a:fillRef>
+          <a:effectRef idx="0">
+            <a:schemeClr val="accent1"/>
+          </a:effectRef>
+          <a:fontRef idx="minor">
+            <a:schemeClr val="lt1"/>
+          </a:fontRef>
+        </p:style>
+        <p:txBody>
+          <a:bodyPr rtlCol="0" anchor="ctr"/>
+          <a:lstStyle/>
+          <a:p>
+            <a:pPr algn="ctr"/>
+            <a:endParaRPr lang="en-US" dirty="0">
+              <a:solidFill>
+                <a:schemeClr val="tx1"/>
+              </a:solidFill>
+            </a:endParaRPr>
+          </a:p>
+        </p:txBody>
+      </p:sp>
+      <p:sp>
+        <p:nvSpPr>
+          <p:cNvPr id="9" name="Shape 8">
+            <a:extLst>
+              <a:ext uri="{FF2B5EF4-FFF2-40B4-BE49-F238E27FC236}">
+                <a16:creationId xmlns:a16="http://schemas.microsoft.com/office/drawing/2014/main" id="{52482E73-EF01-D61F-0296-E77D4F8E30CD}"/>
+              </a:ext>
+            </a:extLst>
+          </p:cNvPr>
+          <p:cNvSpPr/>
+          <p:nvPr/>
+        </p:nvSpPr>
+        <p:spPr>
+          <a:xfrm>
+            <a:off x="2389425" y="1166702"/>
+            <a:ext cx="2069850" cy="2037904"/>
+          </a:xfrm>
+          <a:prstGeom prst="gear6">
+            <a:avLst/>
+          </a:prstGeom>
+          <a:solidFill>
+            <a:schemeClr val="accent6">
+              <a:lumMod val="60000"/>
+              <a:lumOff val="40000"/>
+            </a:schemeClr>
+          </a:solidFill>
+          <a:ln>
+            <a:solidFill>
+              <a:schemeClr val="accent6">
+                <a:lumMod val="60000"/>
+                <a:lumOff val="40000"/>
+              </a:schemeClr>
+            </a:solidFill>
+          </a:ln>
+        </p:spPr>
+        <p:style>
+          <a:lnRef idx="2">
+            <a:schemeClr val="lt1">
+              <a:hueOff val="0"/>
+              <a:satOff val="0"/>
+              <a:lumOff val="0"/>
+              <a:alphaOff val="0"/>
+            </a:schemeClr>
+          </a:lnRef>
+          <a:fillRef idx="1">
+            <a:schemeClr val="accent1">
+              <a:hueOff val="0"/>
+              <a:satOff val="0"/>
+              <a:lumOff val="0"/>
+              <a:alphaOff val="0"/>
+            </a:schemeClr>
+          </a:fillRef>
+          <a:effectRef idx="0">
+            <a:schemeClr val="accent1">
+              <a:hueOff val="0"/>
+              <a:satOff val="0"/>
+              <a:lumOff val="0"/>
+              <a:alphaOff val="0"/>
+            </a:schemeClr>
+          </a:effectRef>
+          <a:fontRef idx="minor">
+            <a:schemeClr val="lt1"/>
+          </a:fontRef>
+        </p:style>
+        <p:txBody>
+          <a:bodyPr/>
+          <a:lstStyle/>
+          <a:p>
+            <a:endParaRPr lang="en-US" dirty="0"/>
+          </a:p>
+        </p:txBody>
+      </p:sp>
+      <p:sp>
+        <p:nvSpPr>
+          <p:cNvPr id="10" name="Oval 9">
+            <a:extLst>
+              <a:ext uri="{FF2B5EF4-FFF2-40B4-BE49-F238E27FC236}">
+                <a16:creationId xmlns:a16="http://schemas.microsoft.com/office/drawing/2014/main" id="{FAA23672-B33C-FA5B-FFFE-26AEC7CC1EA5}"/>
+              </a:ext>
+            </a:extLst>
+          </p:cNvPr>
+          <p:cNvSpPr/>
+          <p:nvPr/>
+        </p:nvSpPr>
+        <p:spPr>
+          <a:xfrm>
+            <a:off x="2795575" y="1596957"/>
+            <a:ext cx="1214038" cy="1180272"/>
+          </a:xfrm>
+          <a:prstGeom prst="ellipse">
+            <a:avLst/>
+          </a:prstGeom>
+          <a:solidFill>
+            <a:schemeClr val="bg1"/>
+          </a:solidFill>
+          <a:ln>
+            <a:solidFill>
+              <a:schemeClr val="bg1"/>
+            </a:solidFill>
+          </a:ln>
+        </p:spPr>
+        <p:style>
+          <a:lnRef idx="2">
+            <a:schemeClr val="accent1">
+              <a:shade val="50000"/>
+            </a:schemeClr>
+          </a:lnRef>
+          <a:fillRef idx="1">
+            <a:schemeClr val="accent1"/>
+          </a:fillRef>
+          <a:effectRef idx="0">
+            <a:schemeClr val="accent1"/>
+          </a:effectRef>
+          <a:fontRef idx="minor">
+            <a:schemeClr val="lt1"/>
+          </a:fontRef>
+        </p:style>
+        <p:txBody>
+          <a:bodyPr rtlCol="0" anchor="ctr"/>
+          <a:lstStyle/>
+          <a:p>
+            <a:pPr algn="ctr"/>
+            <a:endParaRPr lang="en-US" dirty="0">
+              <a:solidFill>
+                <a:schemeClr val="tx1"/>
+              </a:solidFill>
+            </a:endParaRPr>
+          </a:p>
+        </p:txBody>
+      </p:sp>
+      <p:sp>
+        <p:nvSpPr>
+          <p:cNvPr id="11" name="Shape 10">
+            <a:extLst>
+              <a:ext uri="{FF2B5EF4-FFF2-40B4-BE49-F238E27FC236}">
+                <a16:creationId xmlns:a16="http://schemas.microsoft.com/office/drawing/2014/main" id="{9D4251E7-75F0-B1FC-8532-86772EF6693A}"/>
+              </a:ext>
+            </a:extLst>
+          </p:cNvPr>
+          <p:cNvSpPr/>
+          <p:nvPr/>
+        </p:nvSpPr>
+        <p:spPr>
+          <a:xfrm>
+            <a:off x="5301484" y="1901930"/>
+            <a:ext cx="2037904" cy="2037904"/>
+          </a:xfrm>
+          <a:prstGeom prst="gear6">
+            <a:avLst/>
+          </a:prstGeom>
+          <a:solidFill>
+            <a:srgbClr val="83CDAE"/>
+          </a:solidFill>
+          <a:ln>
+            <a:solidFill>
+              <a:srgbClr val="83CDAE"/>
+            </a:solidFill>
+          </a:ln>
+        </p:spPr>
+        <p:style>
+          <a:lnRef idx="2">
+            <a:schemeClr val="lt1">
+              <a:hueOff val="0"/>
+              <a:satOff val="0"/>
+              <a:lumOff val="0"/>
+              <a:alphaOff val="0"/>
+            </a:schemeClr>
+          </a:lnRef>
+          <a:fillRef idx="1">
+            <a:schemeClr val="accent1">
+              <a:hueOff val="0"/>
+              <a:satOff val="0"/>
+              <a:lumOff val="0"/>
+              <a:alphaOff val="0"/>
+            </a:schemeClr>
+          </a:fillRef>
+          <a:effectRef idx="0">
+            <a:schemeClr val="accent1">
+              <a:hueOff val="0"/>
+              <a:satOff val="0"/>
+              <a:lumOff val="0"/>
+              <a:alphaOff val="0"/>
+            </a:schemeClr>
+          </a:effectRef>
+          <a:fontRef idx="minor">
+            <a:schemeClr val="lt1"/>
+          </a:fontRef>
+        </p:style>
+        <p:txBody>
+          <a:bodyPr/>
+          <a:lstStyle/>
+          <a:p>
+            <a:endParaRPr lang="en-US" dirty="0"/>
+          </a:p>
+        </p:txBody>
+      </p:sp>
+      <p:sp>
+        <p:nvSpPr>
+          <p:cNvPr id="12" name="Oval 11">
+            <a:extLst>
+              <a:ext uri="{FF2B5EF4-FFF2-40B4-BE49-F238E27FC236}">
+                <a16:creationId xmlns:a16="http://schemas.microsoft.com/office/drawing/2014/main" id="{0D17FC92-776B-4894-FA67-0B7B9491FBA4}"/>
+              </a:ext>
+            </a:extLst>
+          </p:cNvPr>
+          <p:cNvSpPr/>
+          <p:nvPr/>
+        </p:nvSpPr>
+        <p:spPr>
+          <a:xfrm>
+            <a:off x="5708649" y="2331353"/>
+            <a:ext cx="1224963" cy="1190892"/>
+          </a:xfrm>
+          <a:prstGeom prst="ellipse">
+            <a:avLst/>
+          </a:prstGeom>
+          <a:solidFill>
+            <a:schemeClr val="bg1"/>
+          </a:solidFill>
+          <a:ln>
+            <a:solidFill>
+              <a:schemeClr val="bg1"/>
+            </a:solidFill>
+          </a:ln>
+        </p:spPr>
+        <p:style>
+          <a:lnRef idx="2">
+            <a:schemeClr val="accent1">
+              <a:shade val="50000"/>
+            </a:schemeClr>
+          </a:lnRef>
+          <a:fillRef idx="1">
+            <a:schemeClr val="accent1"/>
+          </a:fillRef>
+          <a:effectRef idx="0">
+            <a:schemeClr val="accent1"/>
+          </a:effectRef>
+          <a:fontRef idx="minor">
+            <a:schemeClr val="lt1"/>
+          </a:fontRef>
+        </p:style>
+        <p:txBody>
+          <a:bodyPr rtlCol="0" anchor="ctr"/>
+          <a:lstStyle/>
+          <a:p>
+            <a:pPr algn="ctr"/>
+            <a:endParaRPr lang="en-US" dirty="0">
+              <a:solidFill>
+                <a:schemeClr val="tx1"/>
+              </a:solidFill>
+            </a:endParaRPr>
+          </a:p>
+        </p:txBody>
+      </p:sp>
+      <p:sp>
+        <p:nvSpPr>
+          <p:cNvPr id="13" name="Shape 4">
+            <a:extLst>
+              <a:ext uri="{FF2B5EF4-FFF2-40B4-BE49-F238E27FC236}">
+                <a16:creationId xmlns:a16="http://schemas.microsoft.com/office/drawing/2014/main" id="{AE813AD7-6103-B65D-4C4C-C3DCA1F9FCA6}"/>
+              </a:ext>
+            </a:extLst>
+          </p:cNvPr>
+          <p:cNvSpPr txBox="1"/>
+          <p:nvPr/>
+        </p:nvSpPr>
+        <p:spPr>
+          <a:xfrm>
+            <a:off x="2816595" y="2058879"/>
+            <a:ext cx="1158360" cy="269946"/>
+          </a:xfrm>
+          <a:prstGeom prst="rect">
+            <a:avLst/>
+          </a:prstGeom>
+        </p:spPr>
+        <p:style>
+          <a:lnRef idx="0">
+            <a:scrgbClr r="0" g="0" b="0"/>
+          </a:lnRef>
+          <a:fillRef idx="0">
+            <a:scrgbClr r="0" g="0" b="0"/>
+          </a:fillRef>
+          <a:effectRef idx="0">
+            <a:scrgbClr r="0" g="0" b="0"/>
+          </a:effectRef>
+          <a:fontRef idx="minor">
+            <a:schemeClr val="lt1"/>
+          </a:fontRef>
+        </p:style>
+        <p:txBody>
+          <a:bodyPr spcFirstLastPara="0" vert="horz" wrap="square" lIns="36830" tIns="36830" rIns="36830" bIns="36830" numCol="1" spcCol="1270" anchor="ctr" anchorCtr="0">
+            <a:noAutofit/>
+          </a:bodyPr>
+          <a:lstStyle/>
+          <a:p>
+            <a:pPr marL="0" lvl="0" indent="0" algn="ctr" defTabSz="1289050">
+              <a:lnSpc>
+                <a:spcPct val="90000"/>
+              </a:lnSpc>
+              <a:spcBef>
+                <a:spcPct val="0"/>
+              </a:spcBef>
+              <a:spcAft>
+                <a:spcPct val="35000"/>
+              </a:spcAft>
+              <a:buNone/>
+            </a:pPr>
+            <a:r>
+              <a:rPr lang="en-US" sz="1700" b="1" dirty="0">
+                <a:solidFill>
+                  <a:schemeClr val="tx1"/>
+                </a:solidFill>
+              </a:rPr>
+              <a:t>Productivity</a:t>
+            </a:r>
+            <a:endParaRPr lang="en-US" sz="1700" b="1" kern="1200" dirty="0">
+              <a:solidFill>
+                <a:schemeClr val="tx1"/>
+              </a:solidFill>
+            </a:endParaRPr>
+          </a:p>
+        </p:txBody>
+      </p:sp>
+      <p:sp>
+        <p:nvSpPr>
+          <p:cNvPr id="14" name="Shape 4">
+            <a:extLst>
+              <a:ext uri="{FF2B5EF4-FFF2-40B4-BE49-F238E27FC236}">
+                <a16:creationId xmlns:a16="http://schemas.microsoft.com/office/drawing/2014/main" id="{DF3DB7EA-F445-31BA-BFE1-D2C9FBD8090E}"/>
+              </a:ext>
+            </a:extLst>
+          </p:cNvPr>
+          <p:cNvSpPr txBox="1"/>
+          <p:nvPr/>
+        </p:nvSpPr>
+        <p:spPr>
+          <a:xfrm>
+            <a:off x="5687629" y="2819025"/>
+            <a:ext cx="1282260" cy="269946"/>
+          </a:xfrm>
+          <a:prstGeom prst="rect">
+            <a:avLst/>
+          </a:prstGeom>
+        </p:spPr>
+        <p:style>
+          <a:lnRef idx="0">
+            <a:scrgbClr r="0" g="0" b="0"/>
+          </a:lnRef>
+          <a:fillRef idx="0">
+            <a:scrgbClr r="0" g="0" b="0"/>
+          </a:fillRef>
+          <a:effectRef idx="0">
+            <a:scrgbClr r="0" g="0" b="0"/>
+          </a:effectRef>
+          <a:fontRef idx="minor">
+            <a:schemeClr val="lt1"/>
+          </a:fontRef>
+        </p:style>
+        <p:txBody>
+          <a:bodyPr spcFirstLastPara="0" vert="horz" wrap="square" lIns="36830" tIns="36830" rIns="36830" bIns="36830" numCol="1" spcCol="1270" anchor="ctr" anchorCtr="0">
+            <a:noAutofit/>
+          </a:bodyPr>
+          <a:lstStyle/>
+          <a:p>
+            <a:pPr marL="0" lvl="0" indent="0" algn="ctr" defTabSz="1289050">
+              <a:lnSpc>
+                <a:spcPct val="90000"/>
+              </a:lnSpc>
+              <a:spcBef>
+                <a:spcPct val="0"/>
+              </a:spcBef>
+              <a:spcAft>
+                <a:spcPct val="35000"/>
+              </a:spcAft>
+              <a:buNone/>
+            </a:pPr>
+            <a:r>
+              <a:rPr lang="en-US" sz="1700" b="1" dirty="0">
+                <a:solidFill>
+                  <a:schemeClr val="tx1"/>
+                </a:solidFill>
+              </a:rPr>
+              <a:t>Performance</a:t>
+            </a:r>
+            <a:endParaRPr lang="en-US" sz="1700" b="1" kern="1200" dirty="0">
+              <a:solidFill>
+                <a:schemeClr val="tx1"/>
+              </a:solidFill>
+            </a:endParaRPr>
+          </a:p>
+        </p:txBody>
+      </p:sp>
+      <p:sp>
+        <p:nvSpPr>
+          <p:cNvPr id="15" name="Shape 4">
+            <a:extLst>
+              <a:ext uri="{FF2B5EF4-FFF2-40B4-BE49-F238E27FC236}">
+                <a16:creationId xmlns:a16="http://schemas.microsoft.com/office/drawing/2014/main" id="{7062F883-101C-8CCB-6CCC-709A5989CFE8}"/>
+              </a:ext>
+            </a:extLst>
+          </p:cNvPr>
+          <p:cNvSpPr txBox="1"/>
+          <p:nvPr/>
+        </p:nvSpPr>
+        <p:spPr>
+          <a:xfrm>
+            <a:off x="2905726" y="4454811"/>
+            <a:ext cx="1282260" cy="269946"/>
+          </a:xfrm>
+          <a:prstGeom prst="rect">
+            <a:avLst/>
+          </a:prstGeom>
+        </p:spPr>
+        <p:style>
+          <a:lnRef idx="0">
+            <a:scrgbClr r="0" g="0" b="0"/>
+          </a:lnRef>
+          <a:fillRef idx="0">
+            <a:scrgbClr r="0" g="0" b="0"/>
+          </a:fillRef>
+          <a:effectRef idx="0">
+            <a:scrgbClr r="0" g="0" b="0"/>
+          </a:effectRef>
+          <a:fontRef idx="minor">
+            <a:schemeClr val="lt1"/>
+          </a:fontRef>
+        </p:style>
+        <p:txBody>
+          <a:bodyPr spcFirstLastPara="0" vert="horz" wrap="square" lIns="36830" tIns="36830" rIns="36830" bIns="36830" numCol="1" spcCol="1270" anchor="ctr" anchorCtr="0">
+            <a:noAutofit/>
+          </a:bodyPr>
+          <a:lstStyle/>
+          <a:p>
+            <a:pPr marL="0" lvl="0" indent="0" algn="ctr" defTabSz="1289050">
+              <a:lnSpc>
+                <a:spcPct val="90000"/>
+              </a:lnSpc>
+              <a:spcBef>
+                <a:spcPct val="0"/>
+              </a:spcBef>
+              <a:spcAft>
+                <a:spcPct val="35000"/>
+              </a:spcAft>
+              <a:buNone/>
+            </a:pPr>
+            <a:r>
+              <a:rPr lang="en-US" sz="1700" b="1" dirty="0">
+                <a:solidFill>
+                  <a:schemeClr val="tx1"/>
+                </a:solidFill>
+              </a:rPr>
+              <a:t>Portability</a:t>
+            </a:r>
+            <a:endParaRPr lang="en-US" sz="1700" b="1" kern="1200" dirty="0">
+              <a:solidFill>
+                <a:schemeClr val="tx1"/>
+              </a:solidFill>
+            </a:endParaRPr>
+          </a:p>
+        </p:txBody>
+      </p:sp>
+      <p:sp>
+        <p:nvSpPr>
+          <p:cNvPr id="16" name="Rounded Rectangular Callout 15">
+            <a:extLst>
+              <a:ext uri="{FF2B5EF4-FFF2-40B4-BE49-F238E27FC236}">
+                <a16:creationId xmlns:a16="http://schemas.microsoft.com/office/drawing/2014/main" id="{C733F46D-F432-C321-787C-1DF89A0FF4CD}"/>
+              </a:ext>
+            </a:extLst>
+          </p:cNvPr>
+          <p:cNvSpPr/>
+          <p:nvPr/>
+        </p:nvSpPr>
+        <p:spPr>
+          <a:xfrm>
+            <a:off x="7559899" y="1166702"/>
+            <a:ext cx="2743199" cy="2992074"/>
+          </a:xfrm>
+          <a:prstGeom prst="wedgeRoundRectCallout">
+            <a:avLst>
+              <a:gd name="adj1" fmla="val 49656"/>
+              <a:gd name="adj2" fmla="val -13634"/>
+              <a:gd name="adj3" fmla="val 16667"/>
+            </a:avLst>
+          </a:prstGeom>
+          <a:solidFill>
+            <a:schemeClr val="accent4">
+              <a:lumMod val="20000"/>
+              <a:lumOff val="80000"/>
+            </a:schemeClr>
+          </a:solidFill>
+          <a:ln>
+            <a:solidFill>
+              <a:schemeClr val="accent6">
+                <a:lumMod val="40000"/>
+                <a:lumOff val="60000"/>
+              </a:schemeClr>
+            </a:solidFill>
+          </a:ln>
+        </p:spPr>
+        <p:style>
+          <a:lnRef idx="2">
+            <a:schemeClr val="accent1">
+              <a:shade val="50000"/>
+            </a:schemeClr>
+          </a:lnRef>
+          <a:fillRef idx="1">
+            <a:schemeClr val="accent1"/>
+          </a:fillRef>
+          <a:effectRef idx="0">
+            <a:schemeClr val="accent1"/>
+          </a:effectRef>
+          <a:fontRef idx="minor">
+            <a:schemeClr val="lt1"/>
+          </a:fontRef>
+        </p:style>
+        <p:txBody>
+          <a:bodyPr rtlCol="0" anchor="ctr"/>
+          <a:lstStyle/>
+          <a:p>
+            <a:pPr algn="ctr"/>
+            <a:r>
+              <a:rPr lang="en-US" sz="2000" b="1" dirty="0">
+                <a:solidFill>
+                  <a:schemeClr val="tx1"/>
+                </a:solidFill>
+              </a:rPr>
+              <a:t>Our Applications</a:t>
+            </a:r>
+          </a:p>
+          <a:p>
+            <a:pPr algn="ctr"/>
+            <a:endParaRPr lang="en-US" dirty="0">
+              <a:solidFill>
+                <a:schemeClr val="tx1"/>
+              </a:solidFill>
+            </a:endParaRPr>
+          </a:p>
+          <a:p>
+            <a:pPr algn="ctr"/>
+            <a:endParaRPr lang="en-US" dirty="0">
+              <a:solidFill>
+                <a:schemeClr val="tx1"/>
+              </a:solidFill>
+            </a:endParaRPr>
+          </a:p>
+          <a:p>
+            <a:pPr algn="ctr"/>
+            <a:endParaRPr lang="en-US" dirty="0">
+              <a:solidFill>
+                <a:schemeClr val="tx1"/>
+              </a:solidFill>
+            </a:endParaRPr>
+          </a:p>
+          <a:p>
+            <a:pPr algn="ctr"/>
+            <a:endParaRPr lang="en-US" dirty="0">
+              <a:solidFill>
+                <a:schemeClr val="tx1"/>
+              </a:solidFill>
+            </a:endParaRPr>
+          </a:p>
+          <a:p>
+            <a:pPr algn="ctr"/>
+            <a:endParaRPr lang="en-US" dirty="0">
+              <a:solidFill>
+                <a:schemeClr val="tx1"/>
+              </a:solidFill>
+            </a:endParaRPr>
+          </a:p>
+          <a:p>
+            <a:pPr algn="ctr"/>
+            <a:endParaRPr lang="en-US" dirty="0">
+              <a:solidFill>
+                <a:schemeClr val="tx1"/>
+              </a:solidFill>
+            </a:endParaRPr>
+          </a:p>
+          <a:p>
+            <a:pPr algn="ctr"/>
+            <a:endParaRPr lang="en-US" dirty="0">
+              <a:solidFill>
+                <a:schemeClr val="tx1"/>
+              </a:solidFill>
+            </a:endParaRPr>
+          </a:p>
+          <a:p>
+            <a:pPr algn="ctr"/>
+            <a:endParaRPr lang="en-US" dirty="0">
+              <a:solidFill>
+                <a:schemeClr val="tx1"/>
+              </a:solidFill>
+            </a:endParaRPr>
+          </a:p>
+          <a:p>
+            <a:pPr algn="ctr"/>
+            <a:endParaRPr lang="en-US" dirty="0">
+              <a:solidFill>
+                <a:schemeClr val="tx1"/>
+              </a:solidFill>
+            </a:endParaRPr>
+          </a:p>
+        </p:txBody>
+      </p:sp>
+      <p:grpSp>
+        <p:nvGrpSpPr>
+          <p:cNvPr id="17" name="Group 16">
+            <a:extLst>
+              <a:ext uri="{FF2B5EF4-FFF2-40B4-BE49-F238E27FC236}">
+                <a16:creationId xmlns:a16="http://schemas.microsoft.com/office/drawing/2014/main" id="{ECD7CDC3-20B8-E650-8B43-192D30590F0F}"/>
+              </a:ext>
+            </a:extLst>
+          </p:cNvPr>
+          <p:cNvGrpSpPr/>
+          <p:nvPr/>
+        </p:nvGrpSpPr>
+        <p:grpSpPr>
+          <a:xfrm>
+            <a:off x="7794805" y="1658774"/>
+            <a:ext cx="962627" cy="1316015"/>
+            <a:chOff x="10199359" y="1422677"/>
+            <a:chExt cx="962627" cy="1316015"/>
+          </a:xfrm>
+        </p:grpSpPr>
+        <p:pic>
+          <p:nvPicPr>
+            <p:cNvPr id="18" name="Picture 6" descr="Gear with Circuit Silhouette Style Icon Vector Design Stock Vector -  Illustration of style, inspiration: 187448893">
+              <a:extLst>
+                <a:ext uri="{FF2B5EF4-FFF2-40B4-BE49-F238E27FC236}">
+                  <a16:creationId xmlns:a16="http://schemas.microsoft.com/office/drawing/2014/main" id="{68D6E381-5F2A-D403-207B-5B83DD47307F}"/>
+                </a:ext>
+              </a:extLst>
+            </p:cNvPr>
+            <p:cNvPicPr>
+              <a:picLocks noChangeAspect="1" noChangeArrowheads="1"/>
+            </p:cNvPicPr>
+            <p:nvPr/>
+          </p:nvPicPr>
+          <p:blipFill rotWithShape="1">
+            <a:blip r:embed="rId2">
+              <a:clrChange>
+                <a:clrFrom>
+                  <a:srgbClr val="FFFFFF"/>
+                </a:clrFrom>
+                <a:clrTo>
+                  <a:srgbClr val="FFFFFF">
+                    <a:alpha val="0"/>
+                  </a:srgbClr>
+                </a:clrTo>
+              </a:clrChange>
+              <a:extLst>
+                <a:ext uri="{28A0092B-C50C-407E-A947-70E740481C1C}">
+                  <a14:useLocalDpi xmlns:a14="http://schemas.microsoft.com/office/drawing/2010/main" val="0"/>
+                </a:ext>
+              </a:extLst>
+            </a:blip>
+            <a:srcRect l="11876" t="13026" r="12355" b="11945"/>
+            <a:stretch/>
+          </p:blipFill>
+          <p:spPr bwMode="auto">
+            <a:xfrm>
+              <a:off x="10199359" y="1422677"/>
+              <a:ext cx="962627" cy="953214"/>
+            </a:xfrm>
+            <a:prstGeom prst="rect">
+              <a:avLst/>
+            </a:prstGeom>
+            <a:noFill/>
+            <a:extLst>
+              <a:ext uri="{909E8E84-426E-40DD-AFC4-6F175D3DCCD1}">
+                <a14:hiddenFill xmlns:a14="http://schemas.microsoft.com/office/drawing/2010/main">
+                  <a:solidFill>
+                    <a:srgbClr val="FFFFFF"/>
+                  </a:solidFill>
+                </a14:hiddenFill>
+              </a:ext>
+            </a:extLst>
+          </p:spPr>
+        </p:pic>
+        <p:sp>
+          <p:nvSpPr>
+            <p:cNvPr id="19" name="TextBox 18">
+              <a:extLst>
+                <a:ext uri="{FF2B5EF4-FFF2-40B4-BE49-F238E27FC236}">
+                  <a16:creationId xmlns:a16="http://schemas.microsoft.com/office/drawing/2014/main" id="{150DD4B0-1664-FDF4-8EEB-E200C84B0EC3}"/>
+                </a:ext>
+              </a:extLst>
+            </p:cNvPr>
+            <p:cNvSpPr txBox="1"/>
+            <p:nvPr/>
+          </p:nvSpPr>
+          <p:spPr>
+            <a:xfrm>
+              <a:off x="10199359" y="2369360"/>
+              <a:ext cx="962627" cy="369332"/>
+            </a:xfrm>
+            <a:prstGeom prst="rect">
+              <a:avLst/>
+            </a:prstGeom>
+            <a:noFill/>
+          </p:spPr>
+          <p:txBody>
+            <a:bodyPr wrap="square" rtlCol="0">
+              <a:spAutoFit/>
+            </a:bodyPr>
+            <a:lstStyle/>
+            <a:p>
+              <a:pPr algn="ctr"/>
+              <a:r>
+                <a:rPr lang="en-US" dirty="0">
+                  <a:latin typeface="Arial" panose="020B0604020202020204" pitchFamily="34" charset="0"/>
+                  <a:cs typeface="Arial" panose="020B0604020202020204" pitchFamily="34" charset="0"/>
+                </a:rPr>
+                <a:t>EDA</a:t>
+              </a:r>
+            </a:p>
+          </p:txBody>
+        </p:sp>
+      </p:grpSp>
+      <p:sp>
+        <p:nvSpPr>
+          <p:cNvPr id="22" name="TextBox 21">
+            <a:extLst>
+              <a:ext uri="{FF2B5EF4-FFF2-40B4-BE49-F238E27FC236}">
+                <a16:creationId xmlns:a16="http://schemas.microsoft.com/office/drawing/2014/main" id="{08979E2E-1172-E646-A69C-B1C6D655CCB0}"/>
+              </a:ext>
+            </a:extLst>
+          </p:cNvPr>
+          <p:cNvSpPr txBox="1"/>
+          <p:nvPr/>
+        </p:nvSpPr>
+        <p:spPr>
+          <a:xfrm>
+            <a:off x="9168468" y="2606420"/>
+            <a:ext cx="962627" cy="369332"/>
+          </a:xfrm>
+          <a:prstGeom prst="rect">
+            <a:avLst/>
+          </a:prstGeom>
+          <a:noFill/>
+        </p:spPr>
+        <p:txBody>
+          <a:bodyPr wrap="square" rtlCol="0">
+            <a:spAutoFit/>
+          </a:bodyPr>
+          <a:lstStyle/>
+          <a:p>
+            <a:pPr algn="ctr"/>
+            <a:r>
+              <a:rPr lang="en-US" dirty="0">
+                <a:latin typeface="Arial" panose="020B0604020202020204" pitchFamily="34" charset="0"/>
+                <a:cs typeface="Arial" panose="020B0604020202020204" pitchFamily="34" charset="0"/>
+              </a:rPr>
+              <a:t>ML</a:t>
+            </a:r>
+          </a:p>
+        </p:txBody>
+      </p:sp>
+      <p:sp>
+        <p:nvSpPr>
+          <p:cNvPr id="23" name="TextBox 22">
+            <a:extLst>
+              <a:ext uri="{FF2B5EF4-FFF2-40B4-BE49-F238E27FC236}">
+                <a16:creationId xmlns:a16="http://schemas.microsoft.com/office/drawing/2014/main" id="{9A708FFB-C291-F76C-CCBC-EC9CA42250EF}"/>
+              </a:ext>
+            </a:extLst>
+          </p:cNvPr>
+          <p:cNvSpPr txBox="1"/>
+          <p:nvPr/>
+        </p:nvSpPr>
+        <p:spPr>
+          <a:xfrm>
+            <a:off x="7746553" y="3734085"/>
+            <a:ext cx="2422002" cy="369332"/>
+          </a:xfrm>
+          <a:prstGeom prst="rect">
+            <a:avLst/>
+          </a:prstGeom>
+          <a:noFill/>
+        </p:spPr>
+        <p:txBody>
+          <a:bodyPr wrap="square" rtlCol="0">
+            <a:spAutoFit/>
+          </a:bodyPr>
+          <a:lstStyle/>
+          <a:p>
+            <a:pPr algn="ctr"/>
+            <a:r>
+              <a:rPr lang="en-US" dirty="0">
+                <a:latin typeface="Arial" panose="020B0604020202020204" pitchFamily="34" charset="0"/>
+                <a:cs typeface="Arial" panose="020B0604020202020204" pitchFamily="34" charset="0"/>
+              </a:rPr>
+              <a:t>Quantum Computing</a:t>
+            </a:r>
+          </a:p>
+        </p:txBody>
+      </p:sp>
+      <p:pic>
+        <p:nvPicPr>
+          <p:cNvPr id="24" name="Picture 2" descr="Quantum computing - Free computer icons">
+            <a:extLst>
+              <a:ext uri="{FF2B5EF4-FFF2-40B4-BE49-F238E27FC236}">
+                <a16:creationId xmlns:a16="http://schemas.microsoft.com/office/drawing/2014/main" id="{D482F623-89DF-16FB-F8EF-46ABA9F2D9ED}"/>
+              </a:ext>
+            </a:extLst>
+          </p:cNvPr>
+          <p:cNvPicPr>
+            <a:picLocks noChangeAspect="1" noChangeArrowheads="1"/>
+          </p:cNvPicPr>
+          <p:nvPr/>
+        </p:nvPicPr>
+        <p:blipFill>
+          <a:blip r:embed="rId3">
+            <a:extLst>
+              <a:ext uri="{28A0092B-C50C-407E-A947-70E740481C1C}">
+                <a14:useLocalDpi xmlns:a14="http://schemas.microsoft.com/office/drawing/2010/main" val="0"/>
+              </a:ext>
+            </a:extLst>
+          </a:blip>
+          <a:srcRect/>
+          <a:stretch>
+            <a:fillRect/>
+          </a:stretch>
+        </p:blipFill>
+        <p:spPr bwMode="auto">
+          <a:xfrm>
+            <a:off x="8607746" y="2925748"/>
+            <a:ext cx="781616" cy="781616"/>
+          </a:xfrm>
+          <a:prstGeom prst="rect">
+            <a:avLst/>
+          </a:prstGeom>
+          <a:noFill/>
+          <a:extLst>
+            <a:ext uri="{909E8E84-426E-40DD-AFC4-6F175D3DCCD1}">
+              <a14:hiddenFill xmlns:a14="http://schemas.microsoft.com/office/drawing/2010/main">
+                <a:solidFill>
+                  <a:srgbClr val="FFFFFF"/>
+                </a:solidFill>
+              </a14:hiddenFill>
+            </a:ext>
+          </a:extLst>
+        </p:spPr>
+      </p:pic>
+      <p:cxnSp>
+        <p:nvCxnSpPr>
+          <p:cNvPr id="25" name="Elbow Connector 24">
+            <a:extLst>
+              <a:ext uri="{FF2B5EF4-FFF2-40B4-BE49-F238E27FC236}">
+                <a16:creationId xmlns:a16="http://schemas.microsoft.com/office/drawing/2014/main" id="{8A7FDC6B-BB2F-A687-34E8-6170B99D5A60}"/>
+              </a:ext>
+            </a:extLst>
+          </p:cNvPr>
+          <p:cNvCxnSpPr>
+            <a:cxnSpLocks/>
+            <a:stCxn id="3" idx="2"/>
+            <a:endCxn id="16" idx="2"/>
+          </p:cNvCxnSpPr>
+          <p:nvPr/>
+        </p:nvCxnSpPr>
+        <p:spPr>
+          <a:xfrm rot="5400000" flipH="1" flipV="1">
+            <a:off x="6712778" y="2116497"/>
+            <a:ext cx="176442" cy="4260999"/>
+          </a:xfrm>
+          <a:prstGeom prst="bentConnector3">
+            <a:avLst>
+              <a:gd name="adj1" fmla="val -142000"/>
+            </a:avLst>
+          </a:prstGeom>
+          <a:ln w="38100">
+            <a:solidFill>
+              <a:schemeClr val="accent5">
+                <a:lumMod val="75000"/>
+              </a:schemeClr>
+            </a:solidFill>
+            <a:headEnd type="triangle" w="med" len="med"/>
+            <a:tailEnd type="triangle" w="med" len="med"/>
+          </a:ln>
+        </p:spPr>
+        <p:style>
+          <a:lnRef idx="1">
+            <a:schemeClr val="accent1"/>
+          </a:lnRef>
+          <a:fillRef idx="0">
+            <a:schemeClr val="accent1"/>
+          </a:fillRef>
+          <a:effectRef idx="0">
+            <a:schemeClr val="accent1"/>
+          </a:effectRef>
+          <a:fontRef idx="minor">
+            <a:schemeClr val="tx1"/>
+          </a:fontRef>
+        </p:style>
+      </p:cxnSp>
+      <p:sp>
+        <p:nvSpPr>
+          <p:cNvPr id="26" name="Rounded Rectangle 25">
+            <a:extLst>
+              <a:ext uri="{FF2B5EF4-FFF2-40B4-BE49-F238E27FC236}">
+                <a16:creationId xmlns:a16="http://schemas.microsoft.com/office/drawing/2014/main" id="{716B095F-A1B1-A0DD-24C9-1EA0BE6E6E3B}"/>
+              </a:ext>
+            </a:extLst>
+          </p:cNvPr>
+          <p:cNvSpPr/>
+          <p:nvPr/>
+        </p:nvSpPr>
+        <p:spPr>
+          <a:xfrm>
+            <a:off x="4524554" y="4730906"/>
+            <a:ext cx="5778543" cy="476995"/>
+          </a:xfrm>
+          <a:prstGeom prst="roundRect">
+            <a:avLst/>
+          </a:prstGeom>
+          <a:solidFill>
+            <a:schemeClr val="accent5">
+              <a:lumMod val="75000"/>
+            </a:schemeClr>
+          </a:solidFill>
+          <a:ln>
+            <a:solidFill>
+              <a:schemeClr val="accent5">
+                <a:lumMod val="75000"/>
+              </a:schemeClr>
+            </a:solidFill>
+          </a:ln>
+        </p:spPr>
+        <p:style>
+          <a:lnRef idx="2">
+            <a:schemeClr val="accent1">
+              <a:shade val="50000"/>
+            </a:schemeClr>
+          </a:lnRef>
+          <a:fillRef idx="1">
+            <a:schemeClr val="accent1"/>
+          </a:fillRef>
+          <a:effectRef idx="0">
+            <a:schemeClr val="accent1"/>
+          </a:effectRef>
+          <a:fontRef idx="minor">
+            <a:schemeClr val="lt1"/>
+          </a:fontRef>
+        </p:style>
+        <p:txBody>
+          <a:bodyPr rtlCol="0" anchor="ctr"/>
+          <a:lstStyle/>
+          <a:p>
+            <a:pPr algn="ctr"/>
+            <a:r>
+              <a:rPr lang="en-US" dirty="0">
+                <a:latin typeface="Arial" panose="020B0604020202020204" pitchFamily="34" charset="0"/>
+                <a:cs typeface="Arial" panose="020B0604020202020204" pitchFamily="34" charset="0"/>
+              </a:rPr>
+              <a:t>We create novel HPC software for ML, EDA, and QC</a:t>
+            </a:r>
+          </a:p>
+        </p:txBody>
+      </p:sp>
+      <p:sp>
+        <p:nvSpPr>
+          <p:cNvPr id="27" name="Shape 4">
+            <a:extLst>
+              <a:ext uri="{FF2B5EF4-FFF2-40B4-BE49-F238E27FC236}">
+                <a16:creationId xmlns:a16="http://schemas.microsoft.com/office/drawing/2014/main" id="{1AF9C84A-708B-3BDC-5750-BA48D9DC5384}"/>
+              </a:ext>
+            </a:extLst>
+          </p:cNvPr>
+          <p:cNvSpPr txBox="1"/>
+          <p:nvPr/>
+        </p:nvSpPr>
+        <p:spPr>
+          <a:xfrm>
+            <a:off x="4128523" y="2890450"/>
+            <a:ext cx="1084542" cy="1049384"/>
+          </a:xfrm>
+          <a:prstGeom prst="rect">
+            <a:avLst/>
+          </a:prstGeom>
+        </p:spPr>
+        <p:style>
+          <a:lnRef idx="0">
+            <a:scrgbClr r="0" g="0" b="0"/>
+          </a:lnRef>
+          <a:fillRef idx="0">
+            <a:scrgbClr r="0" g="0" b="0"/>
+          </a:fillRef>
+          <a:effectRef idx="0">
+            <a:scrgbClr r="0" g="0" b="0"/>
+          </a:effectRef>
+          <a:fontRef idx="minor">
+            <a:schemeClr val="lt1"/>
+          </a:fontRef>
+        </p:style>
+        <p:txBody>
+          <a:bodyPr spcFirstLastPara="0" vert="horz" wrap="square" lIns="36830" tIns="36830" rIns="36830" bIns="36830" numCol="1" spcCol="1270" anchor="ctr" anchorCtr="0">
+            <a:noAutofit/>
+          </a:bodyPr>
+          <a:lstStyle/>
+          <a:p>
+            <a:pPr marL="0" lvl="0" indent="0" algn="ctr" defTabSz="1289050">
+              <a:lnSpc>
+                <a:spcPct val="90000"/>
+              </a:lnSpc>
+              <a:spcBef>
+                <a:spcPct val="0"/>
+              </a:spcBef>
+              <a:spcAft>
+                <a:spcPct val="35000"/>
+              </a:spcAft>
+              <a:buNone/>
+            </a:pPr>
+            <a:r>
+              <a:rPr lang="en-US" sz="2000" b="1" dirty="0">
+                <a:solidFill>
+                  <a:schemeClr val="tx1"/>
+                </a:solidFill>
+              </a:rPr>
+              <a:t>Our Systems</a:t>
+            </a:r>
+            <a:endParaRPr lang="en-US" sz="2000" b="1" kern="1200" dirty="0">
+              <a:solidFill>
+                <a:schemeClr val="tx1"/>
+              </a:solidFill>
+            </a:endParaRPr>
+          </a:p>
+        </p:txBody>
+      </p:sp>
+      <p:pic>
+        <p:nvPicPr>
+          <p:cNvPr id="2" name="Picture 2" descr="Machine learning icon artificial intelligence Vector Image">
+            <a:extLst>
+              <a:ext uri="{FF2B5EF4-FFF2-40B4-BE49-F238E27FC236}">
+                <a16:creationId xmlns:a16="http://schemas.microsoft.com/office/drawing/2014/main" id="{A1526BBA-CC52-8641-FBD1-75CA55236A0D}"/>
+              </a:ext>
+            </a:extLst>
+          </p:cNvPr>
+          <p:cNvPicPr>
+            <a:picLocks noChangeAspect="1" noChangeArrowheads="1"/>
+          </p:cNvPicPr>
+          <p:nvPr/>
+        </p:nvPicPr>
+        <p:blipFill rotWithShape="1">
+          <a:blip r:embed="rId4">
+            <a:clrChange>
+              <a:clrFrom>
+                <a:srgbClr val="F9FAFB"/>
+              </a:clrFrom>
+              <a:clrTo>
+                <a:srgbClr val="F9FAFB">
+                  <a:alpha val="0"/>
+                </a:srgbClr>
+              </a:clrTo>
+            </a:clrChange>
+            <a:extLst>
+              <a:ext uri="{28A0092B-C50C-407E-A947-70E740481C1C}">
+                <a14:useLocalDpi xmlns:a14="http://schemas.microsoft.com/office/drawing/2010/main" val="0"/>
+              </a:ext>
+            </a:extLst>
+          </a:blip>
+          <a:srcRect l="23174" t="13701" r="22855" b="39652"/>
+          <a:stretch/>
+        </p:blipFill>
+        <p:spPr bwMode="auto">
+          <a:xfrm>
+            <a:off x="9168468" y="1713424"/>
+            <a:ext cx="962627" cy="898564"/>
+          </a:xfrm>
+          <a:prstGeom prst="rect">
+            <a:avLst/>
+          </a:prstGeom>
+          <a:noFill/>
+          <a:extLst>
+            <a:ext uri="{909E8E84-426E-40DD-AFC4-6F175D3DCCD1}">
+              <a14:hiddenFill xmlns:a14="http://schemas.microsoft.com/office/drawing/2010/main">
+                <a:solidFill>
+                  <a:srgbClr val="FFFFFF"/>
+                </a:solidFill>
+              </a14:hiddenFill>
+            </a:ext>
+          </a:extLst>
+        </p:spPr>
+      </p:pic>
+    </p:spTree>
+    <p:extLst>
+      <p:ext uri="{BB962C8B-B14F-4D97-AF65-F5344CB8AC3E}">
+        <p14:creationId xmlns:p14="http://schemas.microsoft.com/office/powerpoint/2010/main" val="3182993158"/>
+      </p:ext>
+    </p:extLst>
+  </p:cSld>
+  <p:clrMapOvr>
+    <a:masterClrMapping/>
+  </p:clrMapOvr>
+</p:sld>
+</file>
+
 <file path=ppt/theme/theme1.xml><?xml version="1.0" encoding="utf-8"?>
 <a:theme xmlns:a="http://schemas.openxmlformats.org/drawingml/2006/main" name="Office Theme">
   <a:themeElements>
